--- a/ゲーム科1年/00_前期/プログラミングⅠ/00_はじめに.pptx
+++ b/ゲーム科1年/00_前期/プログラミングⅠ/00_はじめに.pptx
@@ -262,7 +262,7 @@
           <a:p>
             <a:fld id="{E9CC885B-4903-4D54-9A93-00025F12DED9}" type="datetimeFigureOut">
               <a:rPr kumimoji="1" lang="ja-JP" altLang="en-US" smtClean="0"/>
-              <a:t>2024/8/27</a:t>
+              <a:t>2025/2/28</a:t>
             </a:fld>
             <a:endParaRPr kumimoji="1" lang="ja-JP" altLang="en-US"/>
           </a:p>
@@ -492,7 +492,7 @@
           <a:p>
             <a:fld id="{E9CC885B-4903-4D54-9A93-00025F12DED9}" type="datetimeFigureOut">
               <a:rPr kumimoji="1" lang="ja-JP" altLang="en-US" smtClean="0"/>
-              <a:t>2024/8/27</a:t>
+              <a:t>2025/2/28</a:t>
             </a:fld>
             <a:endParaRPr kumimoji="1" lang="ja-JP" altLang="en-US"/>
           </a:p>
@@ -732,7 +732,7 @@
           <a:p>
             <a:fld id="{E9CC885B-4903-4D54-9A93-00025F12DED9}" type="datetimeFigureOut">
               <a:rPr kumimoji="1" lang="ja-JP" altLang="en-US" smtClean="0"/>
-              <a:t>2024/8/27</a:t>
+              <a:t>2025/2/28</a:t>
             </a:fld>
             <a:endParaRPr kumimoji="1" lang="ja-JP" altLang="en-US"/>
           </a:p>
@@ -962,7 +962,7 @@
           <a:p>
             <a:fld id="{E9CC885B-4903-4D54-9A93-00025F12DED9}" type="datetimeFigureOut">
               <a:rPr kumimoji="1" lang="ja-JP" altLang="en-US" smtClean="0"/>
-              <a:t>2024/8/27</a:t>
+              <a:t>2025/2/28</a:t>
             </a:fld>
             <a:endParaRPr kumimoji="1" lang="ja-JP" altLang="en-US"/>
           </a:p>
@@ -1237,7 +1237,7 @@
           <a:p>
             <a:fld id="{E9CC885B-4903-4D54-9A93-00025F12DED9}" type="datetimeFigureOut">
               <a:rPr kumimoji="1" lang="ja-JP" altLang="en-US" smtClean="0"/>
-              <a:t>2024/8/27</a:t>
+              <a:t>2025/2/28</a:t>
             </a:fld>
             <a:endParaRPr kumimoji="1" lang="ja-JP" altLang="en-US"/>
           </a:p>
@@ -1566,7 +1566,7 @@
           <a:p>
             <a:fld id="{E9CC885B-4903-4D54-9A93-00025F12DED9}" type="datetimeFigureOut">
               <a:rPr kumimoji="1" lang="ja-JP" altLang="en-US" smtClean="0"/>
-              <a:t>2024/8/27</a:t>
+              <a:t>2025/2/28</a:t>
             </a:fld>
             <a:endParaRPr kumimoji="1" lang="ja-JP" altLang="en-US"/>
           </a:p>
@@ -2042,7 +2042,7 @@
           <a:p>
             <a:fld id="{E9CC885B-4903-4D54-9A93-00025F12DED9}" type="datetimeFigureOut">
               <a:rPr kumimoji="1" lang="ja-JP" altLang="en-US" smtClean="0"/>
-              <a:t>2024/8/27</a:t>
+              <a:t>2025/2/28</a:t>
             </a:fld>
             <a:endParaRPr kumimoji="1" lang="ja-JP" altLang="en-US"/>
           </a:p>
@@ -2183,7 +2183,7 @@
           <a:p>
             <a:fld id="{E9CC885B-4903-4D54-9A93-00025F12DED9}" type="datetimeFigureOut">
               <a:rPr kumimoji="1" lang="ja-JP" altLang="en-US" smtClean="0"/>
-              <a:t>2024/8/27</a:t>
+              <a:t>2025/2/28</a:t>
             </a:fld>
             <a:endParaRPr kumimoji="1" lang="ja-JP" altLang="en-US"/>
           </a:p>
@@ -2296,7 +2296,7 @@
           <a:p>
             <a:fld id="{E9CC885B-4903-4D54-9A93-00025F12DED9}" type="datetimeFigureOut">
               <a:rPr kumimoji="1" lang="ja-JP" altLang="en-US" smtClean="0"/>
-              <a:t>2024/8/27</a:t>
+              <a:t>2025/2/28</a:t>
             </a:fld>
             <a:endParaRPr kumimoji="1" lang="ja-JP" altLang="en-US"/>
           </a:p>
@@ -2639,7 +2639,7 @@
           <a:p>
             <a:fld id="{E9CC885B-4903-4D54-9A93-00025F12DED9}" type="datetimeFigureOut">
               <a:rPr kumimoji="1" lang="ja-JP" altLang="en-US" smtClean="0"/>
-              <a:t>2024/8/27</a:t>
+              <a:t>2025/2/28</a:t>
             </a:fld>
             <a:endParaRPr kumimoji="1" lang="ja-JP" altLang="en-US"/>
           </a:p>
@@ -2927,7 +2927,7 @@
           <a:p>
             <a:fld id="{E9CC885B-4903-4D54-9A93-00025F12DED9}" type="datetimeFigureOut">
               <a:rPr kumimoji="1" lang="ja-JP" altLang="en-US" smtClean="0"/>
-              <a:t>2024/8/27</a:t>
+              <a:t>2025/2/28</a:t>
             </a:fld>
             <a:endParaRPr kumimoji="1" lang="ja-JP" altLang="en-US"/>
           </a:p>
@@ -3200,7 +3200,7 @@
           <a:p>
             <a:fld id="{E9CC885B-4903-4D54-9A93-00025F12DED9}" type="datetimeFigureOut">
               <a:rPr kumimoji="1" lang="ja-JP" altLang="en-US" smtClean="0"/>
-              <a:t>2024/8/27</a:t>
+              <a:t>2025/2/28</a:t>
             </a:fld>
             <a:endParaRPr kumimoji="1" lang="ja-JP" altLang="en-US"/>
           </a:p>
@@ -3688,7 +3688,7 @@
           </a:p>
           <a:p>
             <a:r>
-              <a:rPr lang="ja-JP" altLang="en-US" sz="2400" dirty="0">
+              <a:rPr lang="ja-JP" altLang="en-US" sz="2400" b="1" dirty="0">
                 <a:solidFill>
                   <a:srgbClr val="FF0000"/>
                 </a:solidFill>
@@ -3840,7 +3840,7 @@
           </a:p>
           <a:p>
             <a:r>
-              <a:rPr lang="ja-JP" altLang="en-US" sz="2400" dirty="0">
+              <a:rPr lang="ja-JP" altLang="en-US" sz="2400" b="1" dirty="0">
                 <a:solidFill>
                   <a:srgbClr val="FF0000"/>
                 </a:solidFill>
@@ -4033,7 +4033,7 @@
           <a:lstStyle/>
           <a:p>
             <a:r>
-              <a:rPr kumimoji="1" lang="ja-JP" altLang="en-US" sz="2400" dirty="0">
+              <a:rPr kumimoji="1" lang="ja-JP" altLang="en-US" sz="2400" b="1" dirty="0">
                 <a:solidFill>
                   <a:srgbClr val="FF0000"/>
                 </a:solidFill>
@@ -4045,7 +4045,7 @@
               <a:t>の表示を「</a:t>
             </a:r>
             <a:r>
-              <a:rPr kumimoji="1" lang="en-US" altLang="ja-JP" sz="2400" dirty="0">
+              <a:rPr kumimoji="1" lang="en-US" altLang="ja-JP" sz="2400" b="1" dirty="0">
                 <a:solidFill>
                   <a:srgbClr val="FF0000"/>
                 </a:solidFill>
@@ -4062,10 +4062,10 @@
       </p:sp>
       <p:pic>
         <p:nvPicPr>
-          <p:cNvPr id="8" name="図 7">
-            <a:extLst>
-              <a:ext uri="{FF2B5EF4-FFF2-40B4-BE49-F238E27FC236}">
-                <a16:creationId xmlns:a16="http://schemas.microsoft.com/office/drawing/2014/main" id="{265D47A5-508E-4606-9A51-B730A9E950A8}"/>
+          <p:cNvPr id="3" name="図 2">
+            <a:extLst>
+              <a:ext uri="{FF2B5EF4-FFF2-40B4-BE49-F238E27FC236}">
+                <a16:creationId xmlns:a16="http://schemas.microsoft.com/office/drawing/2014/main" id="{2AB21077-6392-4B67-A4B7-EAEE55F6774F}"/>
               </a:ext>
             </a:extLst>
           </p:cNvPr>
@@ -4075,21 +4075,15 @@
           <p:nvPr/>
         </p:nvPicPr>
         <p:blipFill>
-          <a:blip r:embed="rId2">
-            <a:extLst>
-              <a:ext uri="{28A0092B-C50C-407E-A947-70E740481C1C}">
-                <a14:useLocalDpi xmlns:a14="http://schemas.microsoft.com/office/drawing/2010/main" val="0"/>
-              </a:ext>
-            </a:extLst>
-          </a:blip>
+          <a:blip r:embed="rId2"/>
           <a:stretch>
             <a:fillRect/>
           </a:stretch>
         </p:blipFill>
         <p:spPr>
           <a:xfrm>
-            <a:off x="567542" y="2113724"/>
-            <a:ext cx="8926171" cy="4553585"/>
+            <a:off x="567542" y="2216781"/>
+            <a:ext cx="4156858" cy="4433062"/>
           </a:xfrm>
           <a:prstGeom prst="rect">
             <a:avLst/>
@@ -4098,10 +4092,10 @@
       </p:pic>
       <p:sp>
         <p:nvSpPr>
-          <p:cNvPr id="9" name="正方形/長方形 8">
-            <a:extLst>
-              <a:ext uri="{FF2B5EF4-FFF2-40B4-BE49-F238E27FC236}">
-                <a16:creationId xmlns:a16="http://schemas.microsoft.com/office/drawing/2014/main" id="{D86E03C4-BE05-45A6-B033-4880E0E275CD}"/>
+          <p:cNvPr id="11" name="正方形/長方形 10">
+            <a:extLst>
+              <a:ext uri="{FF2B5EF4-FFF2-40B4-BE49-F238E27FC236}">
+                <a16:creationId xmlns:a16="http://schemas.microsoft.com/office/drawing/2014/main" id="{EA31FA45-07C5-4503-B34A-1AAB4BDFE447}"/>
               </a:ext>
             </a:extLst>
           </p:cNvPr>
@@ -4110,8 +4104,8 @@
         </p:nvSpPr>
         <p:spPr>
           <a:xfrm>
-            <a:off x="1763486" y="2258690"/>
-            <a:ext cx="382555" cy="316700"/>
+            <a:off x="1238552" y="2812247"/>
+            <a:ext cx="725715" cy="316700"/>
           </a:xfrm>
           <a:prstGeom prst="rect">
             <a:avLst/>
@@ -4150,10 +4144,10 @@
       </p:sp>
       <p:sp>
         <p:nvSpPr>
-          <p:cNvPr id="10" name="正方形/長方形 9">
-            <a:extLst>
-              <a:ext uri="{FF2B5EF4-FFF2-40B4-BE49-F238E27FC236}">
-                <a16:creationId xmlns:a16="http://schemas.microsoft.com/office/drawing/2014/main" id="{E3971450-9A1B-4079-9CDB-46839E7B988A}"/>
+          <p:cNvPr id="12" name="正方形/長方形 11">
+            <a:extLst>
+              <a:ext uri="{FF2B5EF4-FFF2-40B4-BE49-F238E27FC236}">
+                <a16:creationId xmlns:a16="http://schemas.microsoft.com/office/drawing/2014/main" id="{E0291AA0-F28F-406E-B10B-BFF50E28F556}"/>
               </a:ext>
             </a:extLst>
           </p:cNvPr>
@@ -4162,8 +4156,8 @@
         </p:nvSpPr>
         <p:spPr>
           <a:xfrm>
-            <a:off x="6543871" y="2745036"/>
-            <a:ext cx="939280" cy="238804"/>
+            <a:off x="2241317" y="6170634"/>
+            <a:ext cx="1475550" cy="238804"/>
           </a:xfrm>
           <a:prstGeom prst="rect">
             <a:avLst/>
@@ -4301,7 +4295,7 @@
           </a:p>
           <a:p>
             <a:r>
-              <a:rPr lang="ja-JP" altLang="en-US" sz="2400" dirty="0">
+              <a:rPr lang="ja-JP" altLang="en-US" sz="2400" b="1" dirty="0">
                 <a:solidFill>
                   <a:srgbClr val="FF0000"/>
                 </a:solidFill>
@@ -4313,7 +4307,7 @@
               <a:t>も「</a:t>
             </a:r>
             <a:r>
-              <a:rPr lang="en-US" altLang="ja-JP" sz="2400" dirty="0">
+              <a:rPr lang="en-US" altLang="ja-JP" sz="2400" b="1" dirty="0">
                 <a:solidFill>
                   <a:srgbClr val="FF0000"/>
                 </a:solidFill>
@@ -4328,167 +4322,88 @@
           </a:p>
         </p:txBody>
       </p:sp>
-      <p:grpSp>
-        <p:nvGrpSpPr>
-          <p:cNvPr id="3" name="グループ化 2">
-            <a:extLst>
-              <a:ext uri="{FF2B5EF4-FFF2-40B4-BE49-F238E27FC236}">
-                <a16:creationId xmlns:a16="http://schemas.microsoft.com/office/drawing/2014/main" id="{48E06021-E34D-4A72-87BB-DBB774005F13}"/>
-              </a:ext>
-            </a:extLst>
-          </p:cNvPr>
-          <p:cNvGrpSpPr/>
+      <p:pic>
+        <p:nvPicPr>
+          <p:cNvPr id="8" name="図 7">
+            <a:extLst>
+              <a:ext uri="{FF2B5EF4-FFF2-40B4-BE49-F238E27FC236}">
+                <a16:creationId xmlns:a16="http://schemas.microsoft.com/office/drawing/2014/main" id="{35F13652-69E2-41FA-8734-E5B4047FD8EC}"/>
+              </a:ext>
+            </a:extLst>
+          </p:cNvPr>
+          <p:cNvPicPr>
+            <a:picLocks noChangeAspect="1"/>
+          </p:cNvPicPr>
           <p:nvPr/>
-        </p:nvGrpSpPr>
-        <p:grpSpPr>
+        </p:nvPicPr>
+        <p:blipFill>
+          <a:blip r:embed="rId2"/>
+          <a:stretch>
+            <a:fillRect/>
+          </a:stretch>
+        </p:blipFill>
+        <p:spPr>
           <a:xfrm>
-            <a:off x="567542" y="2556588"/>
-            <a:ext cx="8186857" cy="4110721"/>
-            <a:chOff x="567542" y="2113724"/>
-            <a:chExt cx="8926171" cy="4553585"/>
+            <a:off x="567542" y="2555448"/>
+            <a:ext cx="3606525" cy="3846162"/>
           </a:xfrm>
-        </p:grpSpPr>
-        <p:pic>
-          <p:nvPicPr>
-            <p:cNvPr id="7" name="図 6">
-              <a:extLst>
-                <a:ext uri="{FF2B5EF4-FFF2-40B4-BE49-F238E27FC236}">
-                  <a16:creationId xmlns:a16="http://schemas.microsoft.com/office/drawing/2014/main" id="{39B0AA13-55DB-40E6-AF18-6D5B919439FE}"/>
-                </a:ext>
-              </a:extLst>
-            </p:cNvPr>
-            <p:cNvPicPr>
-              <a:picLocks noChangeAspect="1"/>
-            </p:cNvPicPr>
-            <p:nvPr/>
-          </p:nvPicPr>
-          <p:blipFill>
-            <a:blip r:embed="rId2">
-              <a:extLst>
-                <a:ext uri="{28A0092B-C50C-407E-A947-70E740481C1C}">
-                  <a14:useLocalDpi xmlns:a14="http://schemas.microsoft.com/office/drawing/2010/main" val="0"/>
-                </a:ext>
-              </a:extLst>
-            </a:blip>
-            <a:stretch>
-              <a:fillRect/>
-            </a:stretch>
-          </p:blipFill>
-          <p:spPr>
-            <a:xfrm>
-              <a:off x="567542" y="2113724"/>
-              <a:ext cx="8926171" cy="4553585"/>
-            </a:xfrm>
-            <a:prstGeom prst="rect">
-              <a:avLst/>
-            </a:prstGeom>
-          </p:spPr>
-        </p:pic>
-        <p:sp>
-          <p:nvSpPr>
-            <p:cNvPr id="11" name="正方形/長方形 10">
-              <a:extLst>
-                <a:ext uri="{FF2B5EF4-FFF2-40B4-BE49-F238E27FC236}">
-                  <a16:creationId xmlns:a16="http://schemas.microsoft.com/office/drawing/2014/main" id="{F383996B-1DE9-4E91-A2BD-5C1BCAB3D16C}"/>
-                </a:ext>
-              </a:extLst>
-            </p:cNvPr>
-            <p:cNvSpPr/>
-            <p:nvPr/>
-          </p:nvSpPr>
-          <p:spPr>
-            <a:xfrm>
-              <a:off x="1763486" y="2258690"/>
-              <a:ext cx="382555" cy="316700"/>
-            </a:xfrm>
-            <a:prstGeom prst="rect">
-              <a:avLst/>
-            </a:prstGeom>
-            <a:noFill/>
-            <a:ln w="28575">
-              <a:solidFill>
-                <a:srgbClr val="FF0000"/>
-              </a:solidFill>
-            </a:ln>
-          </p:spPr>
-          <p:style>
-            <a:lnRef idx="2">
-              <a:schemeClr val="accent1">
-                <a:shade val="50000"/>
-              </a:schemeClr>
-            </a:lnRef>
-            <a:fillRef idx="1">
-              <a:schemeClr val="accent1"/>
-            </a:fillRef>
-            <a:effectRef idx="0">
-              <a:schemeClr val="accent1"/>
-            </a:effectRef>
-            <a:fontRef idx="minor">
-              <a:schemeClr val="lt1"/>
-            </a:fontRef>
-          </p:style>
-          <p:txBody>
-            <a:bodyPr rtlCol="0" anchor="ctr"/>
-            <a:lstStyle/>
-            <a:p>
-              <a:pPr algn="ctr"/>
-              <a:endParaRPr kumimoji="1" lang="ja-JP" altLang="en-US"/>
-            </a:p>
-          </p:txBody>
-        </p:sp>
-        <p:sp>
-          <p:nvSpPr>
-            <p:cNvPr id="12" name="正方形/長方形 11">
-              <a:extLst>
-                <a:ext uri="{FF2B5EF4-FFF2-40B4-BE49-F238E27FC236}">
-                  <a16:creationId xmlns:a16="http://schemas.microsoft.com/office/drawing/2014/main" id="{3719111B-B7F3-4D4E-9277-2A7276461B68}"/>
-                </a:ext>
-              </a:extLst>
-            </p:cNvPr>
-            <p:cNvSpPr/>
-            <p:nvPr/>
-          </p:nvSpPr>
-          <p:spPr>
-            <a:xfrm>
-              <a:off x="6543871" y="2922315"/>
-              <a:ext cx="817982" cy="238804"/>
-            </a:xfrm>
-            <a:prstGeom prst="rect">
-              <a:avLst/>
-            </a:prstGeom>
-            <a:noFill/>
-            <a:ln w="28575">
-              <a:solidFill>
-                <a:srgbClr val="FF0000"/>
-              </a:solidFill>
-            </a:ln>
-          </p:spPr>
-          <p:style>
-            <a:lnRef idx="2">
-              <a:schemeClr val="accent1">
-                <a:shade val="50000"/>
-              </a:schemeClr>
-            </a:lnRef>
-            <a:fillRef idx="1">
-              <a:schemeClr val="accent1"/>
-            </a:fillRef>
-            <a:effectRef idx="0">
-              <a:schemeClr val="accent1"/>
-            </a:effectRef>
-            <a:fontRef idx="minor">
-              <a:schemeClr val="lt1"/>
-            </a:fontRef>
-          </p:style>
-          <p:txBody>
-            <a:bodyPr rtlCol="0" anchor="ctr"/>
-            <a:lstStyle/>
-            <a:p>
-              <a:pPr algn="ctr"/>
-              <a:endParaRPr kumimoji="1" lang="ja-JP" altLang="en-US"/>
-            </a:p>
-          </p:txBody>
-        </p:sp>
-      </p:grpSp>
+          <a:prstGeom prst="rect">
+            <a:avLst/>
+          </a:prstGeom>
+        </p:spPr>
+      </p:pic>
+      <p:sp>
+        <p:nvSpPr>
+          <p:cNvPr id="9" name="正方形/長方形 8">
+            <a:extLst>
+              <a:ext uri="{FF2B5EF4-FFF2-40B4-BE49-F238E27FC236}">
+                <a16:creationId xmlns:a16="http://schemas.microsoft.com/office/drawing/2014/main" id="{13198D15-63FB-41E7-A554-803567A8C725}"/>
+              </a:ext>
+            </a:extLst>
+          </p:cNvPr>
+          <p:cNvSpPr/>
+          <p:nvPr/>
+        </p:nvSpPr>
+        <p:spPr>
+          <a:xfrm>
+            <a:off x="1970384" y="5942034"/>
+            <a:ext cx="1475550" cy="238804"/>
+          </a:xfrm>
+          <a:prstGeom prst="rect">
+            <a:avLst/>
+          </a:prstGeom>
+          <a:noFill/>
+          <a:ln w="28575">
+            <a:solidFill>
+              <a:srgbClr val="FF0000"/>
+            </a:solidFill>
+          </a:ln>
+        </p:spPr>
+        <p:style>
+          <a:lnRef idx="2">
+            <a:schemeClr val="accent1">
+              <a:shade val="50000"/>
+            </a:schemeClr>
+          </a:lnRef>
+          <a:fillRef idx="1">
+            <a:schemeClr val="accent1"/>
+          </a:fillRef>
+          <a:effectRef idx="0">
+            <a:schemeClr val="accent1"/>
+          </a:effectRef>
+          <a:fontRef idx="minor">
+            <a:schemeClr val="lt1"/>
+          </a:fontRef>
+        </p:style>
+        <p:txBody>
+          <a:bodyPr rtlCol="0" anchor="ctr"/>
+          <a:lstStyle/>
+          <a:p>
+            <a:pPr algn="ctr"/>
+            <a:endParaRPr kumimoji="1" lang="ja-JP" altLang="en-US"/>
+          </a:p>
+        </p:txBody>
+      </p:sp>
     </p:spTree>
     <p:extLst>
       <p:ext uri="{BB962C8B-B14F-4D97-AF65-F5344CB8AC3E}">
